--- a/Nhập môn CNTT/TMĐT Nguyễn Thành Nguyên.pptx
+++ b/Nhập môn CNTT/TMĐT Nguyễn Thành Nguyên.pptx
@@ -237,7 +237,7 @@
           <a:p>
             <a:fld id="{13EEBA99-3E81-4AEA-A05B-423B699C7C4B}" type="datetimeFigureOut">
               <a:rPr lang="en-US" smtClean="0"/>
-              <a:t>10/11/2024</a:t>
+              <a:t>10/19/2024</a:t>
             </a:fld>
             <a:endParaRPr lang="en-US"/>
           </a:p>
@@ -17513,7 +17513,7 @@
                 <a:latin typeface="Times New Roman" panose="02020603050405020304" pitchFamily="18" charset="0"/>
                 <a:cs typeface="Times New Roman" panose="02020603050405020304" pitchFamily="18" charset="0"/>
               </a:rPr>
-              <a:t>ng dụng và thách thức của thương mại điện tử</a:t>
+              <a:t>ng dụng của thương mại điện tử</a:t>
             </a:r>
             <a:endParaRPr lang="en-US" sz="2400" dirty="0">
               <a:latin typeface="Times New Roman" panose="02020603050405020304" pitchFamily="18" charset="0"/>
@@ -17540,8 +17540,8 @@
         </p:nvSpPr>
         <p:spPr>
           <a:xfrm>
-            <a:off x="-98853" y="522699"/>
-            <a:ext cx="4366054" cy="5024662"/>
+            <a:off x="-98854" y="522699"/>
+            <a:ext cx="10047525" cy="5024662"/>
           </a:xfrm>
         </p:spPr>
         <p:txBody>
@@ -17550,103 +17550,17 @@
           </a:bodyPr>
           <a:lstStyle/>
           <a:p>
-            <a:pPr algn="l"/>
-            <a:r>
-              <a:rPr lang="vi-VN" sz="1800" b="1" i="0" dirty="0">
-                <a:solidFill>
-                  <a:srgbClr val="282523"/>
-                </a:solidFill>
-                <a:effectLst/>
-                <a:latin typeface="Times New Roman" panose="02020603050405020304" pitchFamily="18" charset="0"/>
-                <a:cs typeface="Times New Roman" panose="02020603050405020304" pitchFamily="18" charset="0"/>
-              </a:rPr>
-              <a:t>Ứng Dụng của </a:t>
-            </a:r>
-            <a:r>
-              <a:rPr lang="en-US" sz="1800" b="1" i="0" dirty="0">
-                <a:solidFill>
-                  <a:srgbClr val="282523"/>
-                </a:solidFill>
-                <a:effectLst/>
-                <a:latin typeface="Times New Roman" panose="02020603050405020304" pitchFamily="18" charset="0"/>
-                <a:cs typeface="Times New Roman" panose="02020603050405020304" pitchFamily="18" charset="0"/>
-              </a:rPr>
-              <a:t>t</a:t>
-            </a:r>
-            <a:r>
-              <a:rPr lang="vi-VN" sz="1800" b="1" i="0" dirty="0">
-                <a:solidFill>
-                  <a:srgbClr val="282523"/>
-                </a:solidFill>
-                <a:effectLst/>
-                <a:latin typeface="Times New Roman" panose="02020603050405020304" pitchFamily="18" charset="0"/>
-                <a:cs typeface="Times New Roman" panose="02020603050405020304" pitchFamily="18" charset="0"/>
-              </a:rPr>
-              <a:t>hương </a:t>
-            </a:r>
-            <a:r>
-              <a:rPr lang="en-US" sz="1800" b="1" dirty="0">
-                <a:solidFill>
-                  <a:srgbClr val="282523"/>
-                </a:solidFill>
-                <a:latin typeface="Times New Roman" panose="02020603050405020304" pitchFamily="18" charset="0"/>
-                <a:cs typeface="Times New Roman" panose="02020603050405020304" pitchFamily="18" charset="0"/>
-              </a:rPr>
-              <a:t>m</a:t>
-            </a:r>
-            <a:r>
-              <a:rPr lang="vi-VN" sz="1800" b="1" i="0" dirty="0">
-                <a:solidFill>
-                  <a:srgbClr val="282523"/>
-                </a:solidFill>
-                <a:effectLst/>
-                <a:latin typeface="Times New Roman" panose="02020603050405020304" pitchFamily="18" charset="0"/>
-                <a:cs typeface="Times New Roman" panose="02020603050405020304" pitchFamily="18" charset="0"/>
-              </a:rPr>
-              <a:t>ại </a:t>
-            </a:r>
-            <a:r>
-              <a:rPr lang="en-US" sz="1800" b="1" dirty="0">
-                <a:solidFill>
-                  <a:srgbClr val="282523"/>
-                </a:solidFill>
-                <a:latin typeface="Times New Roman" panose="02020603050405020304" pitchFamily="18" charset="0"/>
-                <a:cs typeface="Times New Roman" panose="02020603050405020304" pitchFamily="18" charset="0"/>
-              </a:rPr>
-              <a:t>đ</a:t>
-            </a:r>
-            <a:r>
-              <a:rPr lang="vi-VN" sz="1800" b="1" i="0" dirty="0">
-                <a:solidFill>
-                  <a:srgbClr val="282523"/>
-                </a:solidFill>
-                <a:effectLst/>
-                <a:latin typeface="Times New Roman" panose="02020603050405020304" pitchFamily="18" charset="0"/>
-                <a:cs typeface="Times New Roman" panose="02020603050405020304" pitchFamily="18" charset="0"/>
-              </a:rPr>
-              <a:t>iện </a:t>
-            </a:r>
-            <a:r>
-              <a:rPr lang="en-US" sz="1800" b="1" dirty="0">
-                <a:solidFill>
-                  <a:srgbClr val="282523"/>
-                </a:solidFill>
-                <a:latin typeface="Times New Roman" panose="02020603050405020304" pitchFamily="18" charset="0"/>
-                <a:cs typeface="Times New Roman" panose="02020603050405020304" pitchFamily="18" charset="0"/>
-              </a:rPr>
-              <a:t>t</a:t>
-            </a:r>
-            <a:r>
-              <a:rPr lang="vi-VN" sz="1800" b="1" i="0" dirty="0">
-                <a:solidFill>
-                  <a:srgbClr val="282523"/>
-                </a:solidFill>
-                <a:effectLst/>
-                <a:latin typeface="Times New Roman" panose="02020603050405020304" pitchFamily="18" charset="0"/>
-                <a:cs typeface="Times New Roman" panose="02020603050405020304" pitchFamily="18" charset="0"/>
-              </a:rPr>
-              <a:t>ử</a:t>
-            </a:r>
+            <a:pPr marL="0" indent="0" algn="l">
+              <a:buNone/>
+            </a:pPr>
+            <a:endParaRPr lang="vi-VN" sz="1800" b="1" i="0" dirty="0">
+              <a:solidFill>
+                <a:srgbClr val="282523"/>
+              </a:solidFill>
+              <a:effectLst/>
+              <a:latin typeface="Times New Roman" panose="02020603050405020304" pitchFamily="18" charset="0"/>
+              <a:cs typeface="Times New Roman" panose="02020603050405020304" pitchFamily="18" charset="0"/>
+            </a:endParaRPr>
           </a:p>
           <a:p>
             <a:pPr algn="l">
@@ -17986,715 +17900,6 @@
             <a:pPr marL="0" indent="0">
               <a:buNone/>
             </a:pPr>
-            <a:endParaRPr lang="en-US" sz="1600" dirty="0">
-              <a:latin typeface="Times New Roman" panose="02020603050405020304" pitchFamily="18" charset="0"/>
-              <a:cs typeface="Times New Roman" panose="02020603050405020304" pitchFamily="18" charset="0"/>
-            </a:endParaRPr>
-          </a:p>
-        </p:txBody>
-      </p:sp>
-      <p:sp>
-        <p:nvSpPr>
-          <p:cNvPr id="4" name="Content Placeholder 3">
-            <a:extLst>
-              <a:ext uri="{FF2B5EF4-FFF2-40B4-BE49-F238E27FC236}">
-                <a16:creationId xmlns:a16="http://schemas.microsoft.com/office/drawing/2014/main" id="{BC524D04-C982-C88E-E83C-B06F8C8F53E5}"/>
-              </a:ext>
-            </a:extLst>
-          </p:cNvPr>
-          <p:cNvSpPr>
-            <a:spLocks noGrp="1"/>
-          </p:cNvSpPr>
-          <p:nvPr>
-            <p:ph sz="half" idx="2"/>
-          </p:nvPr>
-        </p:nvSpPr>
-        <p:spPr>
-          <a:xfrm>
-            <a:off x="4909752" y="522699"/>
-            <a:ext cx="5000367" cy="4333506"/>
-          </a:xfrm>
-        </p:spPr>
-        <p:txBody>
-          <a:bodyPr>
-            <a:noAutofit/>
-          </a:bodyPr>
-          <a:lstStyle/>
-          <a:p>
-            <a:r>
-              <a:rPr lang="vi-VN" sz="1800" b="1" dirty="0">
-                <a:solidFill>
-                  <a:srgbClr val="282523"/>
-                </a:solidFill>
-                <a:latin typeface="Times New Roman" panose="02020603050405020304" pitchFamily="18" charset="0"/>
-                <a:cs typeface="Times New Roman" panose="02020603050405020304" pitchFamily="18" charset="0"/>
-              </a:rPr>
-              <a:t>Thách </a:t>
-            </a:r>
-            <a:r>
-              <a:rPr lang="en-US" sz="1800" b="1" dirty="0">
-                <a:solidFill>
-                  <a:srgbClr val="282523"/>
-                </a:solidFill>
-                <a:latin typeface="Times New Roman" panose="02020603050405020304" pitchFamily="18" charset="0"/>
-                <a:cs typeface="Times New Roman" panose="02020603050405020304" pitchFamily="18" charset="0"/>
-              </a:rPr>
-              <a:t>t</a:t>
-            </a:r>
-            <a:r>
-              <a:rPr lang="vi-VN" sz="1800" b="1" dirty="0">
-                <a:solidFill>
-                  <a:srgbClr val="282523"/>
-                </a:solidFill>
-                <a:latin typeface="Times New Roman" panose="02020603050405020304" pitchFamily="18" charset="0"/>
-                <a:cs typeface="Times New Roman" panose="02020603050405020304" pitchFamily="18" charset="0"/>
-              </a:rPr>
-              <a:t>hức của </a:t>
-            </a:r>
-            <a:r>
-              <a:rPr lang="en-US" sz="1800" b="1" dirty="0">
-                <a:solidFill>
-                  <a:srgbClr val="282523"/>
-                </a:solidFill>
-                <a:latin typeface="Times New Roman" panose="02020603050405020304" pitchFamily="18" charset="0"/>
-                <a:cs typeface="Times New Roman" panose="02020603050405020304" pitchFamily="18" charset="0"/>
-              </a:rPr>
-              <a:t>t</a:t>
-            </a:r>
-            <a:r>
-              <a:rPr lang="vi-VN" sz="1800" b="1" dirty="0">
-                <a:solidFill>
-                  <a:srgbClr val="282523"/>
-                </a:solidFill>
-                <a:latin typeface="Times New Roman" panose="02020603050405020304" pitchFamily="18" charset="0"/>
-                <a:cs typeface="Times New Roman" panose="02020603050405020304" pitchFamily="18" charset="0"/>
-              </a:rPr>
-              <a:t>hương </a:t>
-            </a:r>
-            <a:r>
-              <a:rPr lang="en-US" sz="1800" b="1" dirty="0">
-                <a:solidFill>
-                  <a:srgbClr val="282523"/>
-                </a:solidFill>
-                <a:latin typeface="Times New Roman" panose="02020603050405020304" pitchFamily="18" charset="0"/>
-                <a:cs typeface="Times New Roman" panose="02020603050405020304" pitchFamily="18" charset="0"/>
-              </a:rPr>
-              <a:t>m</a:t>
-            </a:r>
-            <a:r>
-              <a:rPr lang="vi-VN" sz="1800" b="1" dirty="0">
-                <a:solidFill>
-                  <a:srgbClr val="282523"/>
-                </a:solidFill>
-                <a:latin typeface="Times New Roman" panose="02020603050405020304" pitchFamily="18" charset="0"/>
-                <a:cs typeface="Times New Roman" panose="02020603050405020304" pitchFamily="18" charset="0"/>
-              </a:rPr>
-              <a:t>ại </a:t>
-            </a:r>
-            <a:r>
-              <a:rPr lang="en-US" sz="1800" b="1" dirty="0">
-                <a:solidFill>
-                  <a:srgbClr val="282523"/>
-                </a:solidFill>
-                <a:latin typeface="Times New Roman" panose="02020603050405020304" pitchFamily="18" charset="0"/>
-                <a:cs typeface="Times New Roman" panose="02020603050405020304" pitchFamily="18" charset="0"/>
-              </a:rPr>
-              <a:t>đ</a:t>
-            </a:r>
-            <a:r>
-              <a:rPr lang="vi-VN" sz="1800" b="1" dirty="0">
-                <a:solidFill>
-                  <a:srgbClr val="282523"/>
-                </a:solidFill>
-                <a:latin typeface="Times New Roman" panose="02020603050405020304" pitchFamily="18" charset="0"/>
-                <a:cs typeface="Times New Roman" panose="02020603050405020304" pitchFamily="18" charset="0"/>
-              </a:rPr>
-              <a:t>iện </a:t>
-            </a:r>
-            <a:r>
-              <a:rPr lang="en-US" sz="1800" b="1" dirty="0">
-                <a:solidFill>
-                  <a:srgbClr val="282523"/>
-                </a:solidFill>
-                <a:latin typeface="Times New Roman" panose="02020603050405020304" pitchFamily="18" charset="0"/>
-                <a:cs typeface="Times New Roman" panose="02020603050405020304" pitchFamily="18" charset="0"/>
-              </a:rPr>
-              <a:t>t</a:t>
-            </a:r>
-            <a:r>
-              <a:rPr lang="vi-VN" sz="1800" b="1" dirty="0">
-                <a:solidFill>
-                  <a:srgbClr val="282523"/>
-                </a:solidFill>
-                <a:latin typeface="Times New Roman" panose="02020603050405020304" pitchFamily="18" charset="0"/>
-                <a:cs typeface="Times New Roman" panose="02020603050405020304" pitchFamily="18" charset="0"/>
-              </a:rPr>
-              <a:t>ử</a:t>
-            </a:r>
-            <a:endParaRPr lang="en-US" sz="1600" b="1" dirty="0">
-              <a:solidFill>
-                <a:srgbClr val="282523"/>
-              </a:solidFill>
-              <a:latin typeface="Times New Roman" panose="02020603050405020304" pitchFamily="18" charset="0"/>
-              <a:cs typeface="Times New Roman" panose="02020603050405020304" pitchFamily="18" charset="0"/>
-            </a:endParaRPr>
-          </a:p>
-          <a:p>
-            <a:pPr>
-              <a:buFont typeface="Wingdings" panose="05000000000000000000" pitchFamily="2" charset="2"/>
-              <a:buChar char="Ø"/>
-            </a:pPr>
-            <a:r>
-              <a:rPr lang="en-US" sz="1600" b="1" dirty="0" err="1">
-                <a:solidFill>
-                  <a:srgbClr val="282523"/>
-                </a:solidFill>
-                <a:latin typeface="Times New Roman" panose="02020603050405020304" pitchFamily="18" charset="0"/>
-                <a:cs typeface="Times New Roman" panose="02020603050405020304" pitchFamily="18" charset="0"/>
-              </a:rPr>
-              <a:t>Bảo</a:t>
-            </a:r>
-            <a:r>
-              <a:rPr lang="en-US" sz="1600" b="1" dirty="0">
-                <a:solidFill>
-                  <a:srgbClr val="282523"/>
-                </a:solidFill>
-                <a:latin typeface="Times New Roman" panose="02020603050405020304" pitchFamily="18" charset="0"/>
-                <a:cs typeface="Times New Roman" panose="02020603050405020304" pitchFamily="18" charset="0"/>
-              </a:rPr>
-              <a:t> </a:t>
-            </a:r>
-            <a:r>
-              <a:rPr lang="en-US" sz="1600" b="1" dirty="0" err="1">
-                <a:solidFill>
-                  <a:srgbClr val="282523"/>
-                </a:solidFill>
-                <a:latin typeface="Times New Roman" panose="02020603050405020304" pitchFamily="18" charset="0"/>
-                <a:cs typeface="Times New Roman" panose="02020603050405020304" pitchFamily="18" charset="0"/>
-              </a:rPr>
-              <a:t>mật</a:t>
-            </a:r>
-            <a:r>
-              <a:rPr lang="en-US" sz="1600" b="1" dirty="0">
-                <a:solidFill>
-                  <a:srgbClr val="282523"/>
-                </a:solidFill>
-                <a:latin typeface="Times New Roman" panose="02020603050405020304" pitchFamily="18" charset="0"/>
-                <a:cs typeface="Times New Roman" panose="02020603050405020304" pitchFamily="18" charset="0"/>
-              </a:rPr>
-              <a:t> </a:t>
-            </a:r>
-            <a:r>
-              <a:rPr lang="en-US" sz="1600" b="1" dirty="0" err="1">
-                <a:solidFill>
-                  <a:srgbClr val="282523"/>
-                </a:solidFill>
-                <a:latin typeface="Times New Roman" panose="02020603050405020304" pitchFamily="18" charset="0"/>
-                <a:cs typeface="Times New Roman" panose="02020603050405020304" pitchFamily="18" charset="0"/>
-              </a:rPr>
-              <a:t>và</a:t>
-            </a:r>
-            <a:r>
-              <a:rPr lang="en-US" sz="1600" b="1" dirty="0">
-                <a:solidFill>
-                  <a:srgbClr val="282523"/>
-                </a:solidFill>
-                <a:latin typeface="Times New Roman" panose="02020603050405020304" pitchFamily="18" charset="0"/>
-                <a:cs typeface="Times New Roman" panose="02020603050405020304" pitchFamily="18" charset="0"/>
-              </a:rPr>
-              <a:t> </a:t>
-            </a:r>
-            <a:r>
-              <a:rPr lang="en-US" sz="1600" b="1" dirty="0" err="1">
-                <a:solidFill>
-                  <a:srgbClr val="282523"/>
-                </a:solidFill>
-                <a:latin typeface="Times New Roman" panose="02020603050405020304" pitchFamily="18" charset="0"/>
-                <a:cs typeface="Times New Roman" panose="02020603050405020304" pitchFamily="18" charset="0"/>
-              </a:rPr>
-              <a:t>quyền</a:t>
-            </a:r>
-            <a:r>
-              <a:rPr lang="en-US" sz="1600" b="1" dirty="0">
-                <a:solidFill>
-                  <a:srgbClr val="282523"/>
-                </a:solidFill>
-                <a:latin typeface="Times New Roman" panose="02020603050405020304" pitchFamily="18" charset="0"/>
-                <a:cs typeface="Times New Roman" panose="02020603050405020304" pitchFamily="18" charset="0"/>
-              </a:rPr>
-              <a:t> </a:t>
-            </a:r>
-            <a:r>
-              <a:rPr lang="en-US" sz="1600" b="1" dirty="0" err="1">
-                <a:solidFill>
-                  <a:srgbClr val="282523"/>
-                </a:solidFill>
-                <a:latin typeface="Times New Roman" panose="02020603050405020304" pitchFamily="18" charset="0"/>
-                <a:cs typeface="Times New Roman" panose="02020603050405020304" pitchFamily="18" charset="0"/>
-              </a:rPr>
-              <a:t>riêng</a:t>
-            </a:r>
-            <a:r>
-              <a:rPr lang="en-US" sz="1600" b="1" dirty="0">
-                <a:solidFill>
-                  <a:srgbClr val="282523"/>
-                </a:solidFill>
-                <a:latin typeface="Times New Roman" panose="02020603050405020304" pitchFamily="18" charset="0"/>
-                <a:cs typeface="Times New Roman" panose="02020603050405020304" pitchFamily="18" charset="0"/>
-              </a:rPr>
-              <a:t> </a:t>
-            </a:r>
-            <a:r>
-              <a:rPr lang="en-US" sz="1600" b="1" dirty="0" err="1">
-                <a:solidFill>
-                  <a:srgbClr val="282523"/>
-                </a:solidFill>
-                <a:latin typeface="Times New Roman" panose="02020603050405020304" pitchFamily="18" charset="0"/>
-                <a:cs typeface="Times New Roman" panose="02020603050405020304" pitchFamily="18" charset="0"/>
-              </a:rPr>
-              <a:t>tư</a:t>
-            </a:r>
-            <a:r>
-              <a:rPr lang="en-US" sz="1600" b="1" dirty="0">
-                <a:solidFill>
-                  <a:srgbClr val="282523"/>
-                </a:solidFill>
-                <a:latin typeface="Times New Roman" panose="02020603050405020304" pitchFamily="18" charset="0"/>
-                <a:cs typeface="Times New Roman" panose="02020603050405020304" pitchFamily="18" charset="0"/>
-              </a:rPr>
-              <a:t>: </a:t>
-            </a:r>
-            <a:r>
-              <a:rPr lang="en-US" sz="1600" dirty="0" err="1">
-                <a:solidFill>
-                  <a:srgbClr val="282523"/>
-                </a:solidFill>
-                <a:latin typeface="Times New Roman" panose="02020603050405020304" pitchFamily="18" charset="0"/>
-                <a:cs typeface="Times New Roman" panose="02020603050405020304" pitchFamily="18" charset="0"/>
-              </a:rPr>
-              <a:t>Nguy</a:t>
-            </a:r>
-            <a:r>
-              <a:rPr lang="en-US" sz="1600" dirty="0">
-                <a:solidFill>
-                  <a:srgbClr val="282523"/>
-                </a:solidFill>
-                <a:latin typeface="Times New Roman" panose="02020603050405020304" pitchFamily="18" charset="0"/>
-                <a:cs typeface="Times New Roman" panose="02020603050405020304" pitchFamily="18" charset="0"/>
-              </a:rPr>
-              <a:t> </a:t>
-            </a:r>
-            <a:r>
-              <a:rPr lang="en-US" sz="1600" dirty="0" err="1">
-                <a:solidFill>
-                  <a:srgbClr val="282523"/>
-                </a:solidFill>
-                <a:latin typeface="Times New Roman" panose="02020603050405020304" pitchFamily="18" charset="0"/>
-                <a:cs typeface="Times New Roman" panose="02020603050405020304" pitchFamily="18" charset="0"/>
-              </a:rPr>
-              <a:t>cơ</a:t>
-            </a:r>
-            <a:r>
-              <a:rPr lang="en-US" sz="1600" dirty="0">
-                <a:solidFill>
-                  <a:srgbClr val="282523"/>
-                </a:solidFill>
-                <a:latin typeface="Times New Roman" panose="02020603050405020304" pitchFamily="18" charset="0"/>
-                <a:cs typeface="Times New Roman" panose="02020603050405020304" pitchFamily="18" charset="0"/>
-              </a:rPr>
-              <a:t> </a:t>
-            </a:r>
-            <a:r>
-              <a:rPr lang="en-US" sz="1600" dirty="0" err="1">
-                <a:solidFill>
-                  <a:srgbClr val="282523"/>
-                </a:solidFill>
-                <a:latin typeface="Times New Roman" panose="02020603050405020304" pitchFamily="18" charset="0"/>
-                <a:cs typeface="Times New Roman" panose="02020603050405020304" pitchFamily="18" charset="0"/>
-              </a:rPr>
-              <a:t>bị</a:t>
-            </a:r>
-            <a:r>
-              <a:rPr lang="en-US" sz="1600" dirty="0">
-                <a:solidFill>
-                  <a:srgbClr val="282523"/>
-                </a:solidFill>
-                <a:latin typeface="Times New Roman" panose="02020603050405020304" pitchFamily="18" charset="0"/>
-                <a:cs typeface="Times New Roman" panose="02020603050405020304" pitchFamily="18" charset="0"/>
-              </a:rPr>
-              <a:t> </a:t>
-            </a:r>
-            <a:r>
-              <a:rPr lang="en-US" sz="1600" dirty="0" err="1">
-                <a:solidFill>
-                  <a:srgbClr val="282523"/>
-                </a:solidFill>
-                <a:latin typeface="Times New Roman" panose="02020603050405020304" pitchFamily="18" charset="0"/>
-                <a:cs typeface="Times New Roman" panose="02020603050405020304" pitchFamily="18" charset="0"/>
-              </a:rPr>
-              <a:t>rò</a:t>
-            </a:r>
-            <a:r>
-              <a:rPr lang="en-US" sz="1600" dirty="0">
-                <a:solidFill>
-                  <a:srgbClr val="282523"/>
-                </a:solidFill>
-                <a:latin typeface="Times New Roman" panose="02020603050405020304" pitchFamily="18" charset="0"/>
-                <a:cs typeface="Times New Roman" panose="02020603050405020304" pitchFamily="18" charset="0"/>
-              </a:rPr>
-              <a:t> </a:t>
-            </a:r>
-            <a:r>
-              <a:rPr lang="en-US" sz="1600" dirty="0" err="1">
-                <a:solidFill>
-                  <a:srgbClr val="282523"/>
-                </a:solidFill>
-                <a:latin typeface="Times New Roman" panose="02020603050405020304" pitchFamily="18" charset="0"/>
-                <a:cs typeface="Times New Roman" panose="02020603050405020304" pitchFamily="18" charset="0"/>
-              </a:rPr>
-              <a:t>rỉ</a:t>
-            </a:r>
-            <a:r>
-              <a:rPr lang="en-US" sz="1600" dirty="0">
-                <a:solidFill>
-                  <a:srgbClr val="282523"/>
-                </a:solidFill>
-                <a:latin typeface="Times New Roman" panose="02020603050405020304" pitchFamily="18" charset="0"/>
-                <a:cs typeface="Times New Roman" panose="02020603050405020304" pitchFamily="18" charset="0"/>
-              </a:rPr>
-              <a:t> </a:t>
-            </a:r>
-            <a:r>
-              <a:rPr lang="en-US" sz="1600" dirty="0" err="1">
-                <a:solidFill>
-                  <a:srgbClr val="282523"/>
-                </a:solidFill>
-                <a:latin typeface="Times New Roman" panose="02020603050405020304" pitchFamily="18" charset="0"/>
-                <a:cs typeface="Times New Roman" panose="02020603050405020304" pitchFamily="18" charset="0"/>
-              </a:rPr>
-              <a:t>thông</a:t>
-            </a:r>
-            <a:r>
-              <a:rPr lang="en-US" sz="1600" dirty="0">
-                <a:solidFill>
-                  <a:srgbClr val="282523"/>
-                </a:solidFill>
-                <a:latin typeface="Times New Roman" panose="02020603050405020304" pitchFamily="18" charset="0"/>
-                <a:cs typeface="Times New Roman" panose="02020603050405020304" pitchFamily="18" charset="0"/>
-              </a:rPr>
-              <a:t> tin </a:t>
-            </a:r>
-            <a:r>
-              <a:rPr lang="en-US" sz="1600" dirty="0" err="1">
-                <a:solidFill>
-                  <a:srgbClr val="282523"/>
-                </a:solidFill>
-                <a:latin typeface="Times New Roman" panose="02020603050405020304" pitchFamily="18" charset="0"/>
-                <a:cs typeface="Times New Roman" panose="02020603050405020304" pitchFamily="18" charset="0"/>
-              </a:rPr>
-              <a:t>cá</a:t>
-            </a:r>
-            <a:r>
-              <a:rPr lang="en-US" sz="1600" dirty="0">
-                <a:solidFill>
-                  <a:srgbClr val="282523"/>
-                </a:solidFill>
-                <a:latin typeface="Times New Roman" panose="02020603050405020304" pitchFamily="18" charset="0"/>
-                <a:cs typeface="Times New Roman" panose="02020603050405020304" pitchFamily="18" charset="0"/>
-              </a:rPr>
-              <a:t> </a:t>
-            </a:r>
-            <a:r>
-              <a:rPr lang="en-US" sz="1600" dirty="0" err="1">
-                <a:solidFill>
-                  <a:srgbClr val="282523"/>
-                </a:solidFill>
-                <a:latin typeface="Times New Roman" panose="02020603050405020304" pitchFamily="18" charset="0"/>
-                <a:cs typeface="Times New Roman" panose="02020603050405020304" pitchFamily="18" charset="0"/>
-              </a:rPr>
-              <a:t>nhân</a:t>
-            </a:r>
-            <a:r>
-              <a:rPr lang="en-US" sz="1600" dirty="0">
-                <a:solidFill>
-                  <a:srgbClr val="282523"/>
-                </a:solidFill>
-                <a:latin typeface="Times New Roman" panose="02020603050405020304" pitchFamily="18" charset="0"/>
-                <a:cs typeface="Times New Roman" panose="02020603050405020304" pitchFamily="18" charset="0"/>
-              </a:rPr>
-              <a:t> </a:t>
-            </a:r>
-            <a:r>
-              <a:rPr lang="en-US" sz="1600" dirty="0" err="1">
-                <a:solidFill>
-                  <a:srgbClr val="282523"/>
-                </a:solidFill>
-                <a:latin typeface="Times New Roman" panose="02020603050405020304" pitchFamily="18" charset="0"/>
-                <a:cs typeface="Times New Roman" panose="02020603050405020304" pitchFamily="18" charset="0"/>
-              </a:rPr>
-              <a:t>và</a:t>
-            </a:r>
-            <a:r>
-              <a:rPr lang="en-US" sz="1600" dirty="0">
-                <a:solidFill>
-                  <a:srgbClr val="282523"/>
-                </a:solidFill>
-                <a:latin typeface="Times New Roman" panose="02020603050405020304" pitchFamily="18" charset="0"/>
-                <a:cs typeface="Times New Roman" panose="02020603050405020304" pitchFamily="18" charset="0"/>
-              </a:rPr>
-              <a:t> </a:t>
-            </a:r>
-            <a:r>
-              <a:rPr lang="en-US" sz="1600" dirty="0" err="1">
-                <a:solidFill>
-                  <a:srgbClr val="282523"/>
-                </a:solidFill>
-                <a:latin typeface="Times New Roman" panose="02020603050405020304" pitchFamily="18" charset="0"/>
-                <a:cs typeface="Times New Roman" panose="02020603050405020304" pitchFamily="18" charset="0"/>
-              </a:rPr>
-              <a:t>tài</a:t>
-            </a:r>
-            <a:r>
-              <a:rPr lang="en-US" sz="1600" dirty="0">
-                <a:solidFill>
-                  <a:srgbClr val="282523"/>
-                </a:solidFill>
-                <a:latin typeface="Times New Roman" panose="02020603050405020304" pitchFamily="18" charset="0"/>
-                <a:cs typeface="Times New Roman" panose="02020603050405020304" pitchFamily="18" charset="0"/>
-              </a:rPr>
-              <a:t> </a:t>
-            </a:r>
-            <a:r>
-              <a:rPr lang="en-US" sz="1600" dirty="0" err="1">
-                <a:solidFill>
-                  <a:srgbClr val="282523"/>
-                </a:solidFill>
-                <a:latin typeface="Times New Roman" panose="02020603050405020304" pitchFamily="18" charset="0"/>
-                <a:cs typeface="Times New Roman" panose="02020603050405020304" pitchFamily="18" charset="0"/>
-              </a:rPr>
-              <a:t>chính</a:t>
-            </a:r>
-            <a:r>
-              <a:rPr lang="en-US" sz="1600" dirty="0">
-                <a:solidFill>
-                  <a:srgbClr val="282523"/>
-                </a:solidFill>
-                <a:latin typeface="Times New Roman" panose="02020603050405020304" pitchFamily="18" charset="0"/>
-                <a:cs typeface="Times New Roman" panose="02020603050405020304" pitchFamily="18" charset="0"/>
-              </a:rPr>
-              <a:t> </a:t>
-            </a:r>
-            <a:r>
-              <a:rPr lang="en-US" sz="1600" dirty="0" err="1">
-                <a:solidFill>
-                  <a:srgbClr val="282523"/>
-                </a:solidFill>
-                <a:latin typeface="Times New Roman" panose="02020603050405020304" pitchFamily="18" charset="0"/>
-                <a:cs typeface="Times New Roman" panose="02020603050405020304" pitchFamily="18" charset="0"/>
-              </a:rPr>
-              <a:t>của</a:t>
-            </a:r>
-            <a:r>
-              <a:rPr lang="en-US" sz="1600" dirty="0">
-                <a:solidFill>
-                  <a:srgbClr val="282523"/>
-                </a:solidFill>
-                <a:latin typeface="Times New Roman" panose="02020603050405020304" pitchFamily="18" charset="0"/>
-                <a:cs typeface="Times New Roman" panose="02020603050405020304" pitchFamily="18" charset="0"/>
-              </a:rPr>
-              <a:t> </a:t>
-            </a:r>
-            <a:r>
-              <a:rPr lang="en-US" sz="1600" dirty="0" err="1">
-                <a:solidFill>
-                  <a:srgbClr val="282523"/>
-                </a:solidFill>
-                <a:latin typeface="Times New Roman" panose="02020603050405020304" pitchFamily="18" charset="0"/>
-                <a:cs typeface="Times New Roman" panose="02020603050405020304" pitchFamily="18" charset="0"/>
-              </a:rPr>
-              <a:t>khách</a:t>
-            </a:r>
-            <a:r>
-              <a:rPr lang="en-US" sz="1600" dirty="0">
-                <a:solidFill>
-                  <a:srgbClr val="282523"/>
-                </a:solidFill>
-                <a:latin typeface="Times New Roman" panose="02020603050405020304" pitchFamily="18" charset="0"/>
-                <a:cs typeface="Times New Roman" panose="02020603050405020304" pitchFamily="18" charset="0"/>
-              </a:rPr>
-              <a:t> </a:t>
-            </a:r>
-            <a:r>
-              <a:rPr lang="en-US" sz="1600" dirty="0" err="1">
-                <a:solidFill>
-                  <a:srgbClr val="282523"/>
-                </a:solidFill>
-                <a:latin typeface="Times New Roman" panose="02020603050405020304" pitchFamily="18" charset="0"/>
-                <a:cs typeface="Times New Roman" panose="02020603050405020304" pitchFamily="18" charset="0"/>
-              </a:rPr>
-              <a:t>hàng</a:t>
-            </a:r>
-            <a:r>
-              <a:rPr lang="en-US" sz="1600" dirty="0">
-                <a:solidFill>
-                  <a:srgbClr val="282523"/>
-                </a:solidFill>
-                <a:latin typeface="Times New Roman" panose="02020603050405020304" pitchFamily="18" charset="0"/>
-                <a:cs typeface="Times New Roman" panose="02020603050405020304" pitchFamily="18" charset="0"/>
-              </a:rPr>
-              <a:t>. </a:t>
-            </a:r>
-          </a:p>
-          <a:p>
-            <a:pPr>
-              <a:buFont typeface="Wingdings" panose="05000000000000000000" pitchFamily="2" charset="2"/>
-              <a:buChar char="Ø"/>
-            </a:pPr>
-            <a:r>
-              <a:rPr lang="en-US" sz="1600" b="1" dirty="0">
-                <a:solidFill>
-                  <a:srgbClr val="282523"/>
-                </a:solidFill>
-                <a:latin typeface="Times New Roman" panose="02020603050405020304" pitchFamily="18" charset="0"/>
-                <a:cs typeface="Times New Roman" panose="02020603050405020304" pitchFamily="18" charset="0"/>
-              </a:rPr>
-              <a:t>G</a:t>
-            </a:r>
-            <a:r>
-              <a:rPr lang="vi-VN" sz="1600" b="1" dirty="0">
-                <a:solidFill>
-                  <a:srgbClr val="282523"/>
-                </a:solidFill>
-                <a:latin typeface="Times New Roman" panose="02020603050405020304" pitchFamily="18" charset="0"/>
-                <a:cs typeface="Times New Roman" panose="02020603050405020304" pitchFamily="18" charset="0"/>
-              </a:rPr>
-              <a:t>ian Lận và Lừa Đảo</a:t>
-            </a:r>
-            <a:r>
-              <a:rPr lang="vi-VN" sz="1600" dirty="0">
-                <a:solidFill>
-                  <a:srgbClr val="282523"/>
-                </a:solidFill>
-                <a:latin typeface="Times New Roman" panose="02020603050405020304" pitchFamily="18" charset="0"/>
-                <a:cs typeface="Times New Roman" panose="02020603050405020304" pitchFamily="18" charset="0"/>
-              </a:rPr>
-              <a:t>: Các hình thức lừa đảo trực tuyến có thể gây thiệt hại cho cả người mua và người bán.</a:t>
-            </a:r>
-            <a:endParaRPr lang="en-US" sz="1600" b="1" dirty="0">
-              <a:solidFill>
-                <a:srgbClr val="282523"/>
-              </a:solidFill>
-              <a:latin typeface="Times New Roman" panose="02020603050405020304" pitchFamily="18" charset="0"/>
-              <a:cs typeface="Times New Roman" panose="02020603050405020304" pitchFamily="18" charset="0"/>
-            </a:endParaRPr>
-          </a:p>
-          <a:p>
-            <a:pPr>
-              <a:buFont typeface="Wingdings" panose="05000000000000000000" pitchFamily="2" charset="2"/>
-              <a:buChar char="Ø"/>
-            </a:pPr>
-            <a:r>
-              <a:rPr lang="vi-VN" sz="1600" b="1" dirty="0">
-                <a:solidFill>
-                  <a:srgbClr val="282523"/>
-                </a:solidFill>
-                <a:latin typeface="Times New Roman" panose="02020603050405020304" pitchFamily="18" charset="0"/>
-                <a:cs typeface="Times New Roman" panose="02020603050405020304" pitchFamily="18" charset="0"/>
-              </a:rPr>
-              <a:t>Logistics và Vận Chuyển</a:t>
-            </a:r>
-            <a:r>
-              <a:rPr lang="vi-VN" sz="1600" dirty="0">
-                <a:solidFill>
-                  <a:srgbClr val="282523"/>
-                </a:solidFill>
-                <a:latin typeface="Times New Roman" panose="02020603050405020304" pitchFamily="18" charset="0"/>
-                <a:cs typeface="Times New Roman" panose="02020603050405020304" pitchFamily="18" charset="0"/>
-              </a:rPr>
-              <a:t>: Chi phí và thời gian giao hàng có thể ảnh hưởng đến trải nghiệm mua sắm của khách hàng.</a:t>
-            </a:r>
-            <a:endParaRPr lang="en-US" sz="1600" dirty="0">
-              <a:solidFill>
-                <a:srgbClr val="282523"/>
-              </a:solidFill>
-              <a:latin typeface="Times New Roman" panose="02020603050405020304" pitchFamily="18" charset="0"/>
-              <a:cs typeface="Times New Roman" panose="02020603050405020304" pitchFamily="18" charset="0"/>
-            </a:endParaRPr>
-          </a:p>
-          <a:p>
-            <a:pPr>
-              <a:buFont typeface="Wingdings" panose="05000000000000000000" pitchFamily="2" charset="2"/>
-              <a:buChar char="Ø"/>
-            </a:pPr>
-            <a:r>
-              <a:rPr lang="vi-VN" sz="1600" b="1" dirty="0">
-                <a:solidFill>
-                  <a:srgbClr val="282523"/>
-                </a:solidFill>
-                <a:latin typeface="Times New Roman" panose="02020603050405020304" pitchFamily="18" charset="0"/>
-                <a:cs typeface="Times New Roman" panose="02020603050405020304" pitchFamily="18" charset="0"/>
-              </a:rPr>
-              <a:t>Cạnh Tranh Cao</a:t>
-            </a:r>
-            <a:r>
-              <a:rPr lang="vi-VN" sz="1600" dirty="0">
-                <a:solidFill>
-                  <a:srgbClr val="282523"/>
-                </a:solidFill>
-                <a:latin typeface="Times New Roman" panose="02020603050405020304" pitchFamily="18" charset="0"/>
-                <a:cs typeface="Times New Roman" panose="02020603050405020304" pitchFamily="18" charset="0"/>
-              </a:rPr>
-              <a:t>: Nhiều doanh nghiệp phải đối mặt với áp lực cạnh tranh gay gắt để thu hút và giữ chân khách hàng.</a:t>
-            </a:r>
-            <a:endParaRPr lang="en-US" sz="1600" dirty="0">
-              <a:solidFill>
-                <a:srgbClr val="282523"/>
-              </a:solidFill>
-              <a:latin typeface="Times New Roman" panose="02020603050405020304" pitchFamily="18" charset="0"/>
-              <a:cs typeface="Times New Roman" panose="02020603050405020304" pitchFamily="18" charset="0"/>
-            </a:endParaRPr>
-          </a:p>
-          <a:p>
-            <a:pPr>
-              <a:buFont typeface="Wingdings" panose="05000000000000000000" pitchFamily="2" charset="2"/>
-              <a:buChar char="Ø"/>
-            </a:pPr>
-            <a:r>
-              <a:rPr lang="vi-VN" sz="1600" b="1" dirty="0">
-                <a:solidFill>
-                  <a:srgbClr val="282523"/>
-                </a:solidFill>
-                <a:latin typeface="Times New Roman" panose="02020603050405020304" pitchFamily="18" charset="0"/>
-                <a:cs typeface="Times New Roman" panose="02020603050405020304" pitchFamily="18" charset="0"/>
-              </a:rPr>
-              <a:t>Pháp Lý và Quy Định</a:t>
-            </a:r>
-            <a:r>
-              <a:rPr lang="vi-VN" sz="1600" dirty="0">
-                <a:solidFill>
-                  <a:srgbClr val="282523"/>
-                </a:solidFill>
-                <a:latin typeface="Times New Roman" panose="02020603050405020304" pitchFamily="18" charset="0"/>
-                <a:cs typeface="Times New Roman" panose="02020603050405020304" pitchFamily="18" charset="0"/>
-              </a:rPr>
-              <a:t>: Các quy định pháp lý và thuế quan khác nhau ở từng quốc gia có thể gây khó khăn cho doanh nghiệp hoạt động quốc tế</a:t>
-            </a:r>
-            <a:r>
-              <a:rPr lang="en-US" sz="1600" dirty="0">
-                <a:solidFill>
-                  <a:srgbClr val="282523"/>
-                </a:solidFill>
-                <a:latin typeface="Times New Roman" panose="02020603050405020304" pitchFamily="18" charset="0"/>
-                <a:cs typeface="Times New Roman" panose="02020603050405020304" pitchFamily="18" charset="0"/>
-              </a:rPr>
-              <a:t>.</a:t>
-            </a:r>
-            <a:br>
-              <a:rPr lang="en-US" sz="1600" dirty="0">
-                <a:latin typeface="Times New Roman" panose="02020603050405020304" pitchFamily="18" charset="0"/>
-                <a:cs typeface="Times New Roman" panose="02020603050405020304" pitchFamily="18" charset="0"/>
-              </a:rPr>
-            </a:br>
             <a:endParaRPr lang="en-US" sz="1600" dirty="0">
               <a:latin typeface="Times New Roman" panose="02020603050405020304" pitchFamily="18" charset="0"/>
               <a:cs typeface="Times New Roman" panose="02020603050405020304" pitchFamily="18" charset="0"/>
@@ -18796,7 +18001,7 @@
                                         <p:tgtEl>
                                           <p:spTgt spid="3">
                                             <p:txEl>
-                                              <p:pRg st="0" end="0"/>
+                                              <p:pRg st="1" end="1"/>
                                             </p:txEl>
                                           </p:spTgt>
                                         </p:tgtEl>
@@ -18814,7 +18019,7 @@
                                         <p:tgtEl>
                                           <p:spTgt spid="3">
                                             <p:txEl>
-                                              <p:pRg st="0" end="0"/>
+                                              <p:pRg st="1" end="1"/>
                                             </p:txEl>
                                           </p:spTgt>
                                         </p:tgtEl>
@@ -18841,7 +18046,7 @@
                                         <p:tgtEl>
                                           <p:spTgt spid="3">
                                             <p:txEl>
-                                              <p:pRg st="0" end="0"/>
+                                              <p:pRg st="1" end="1"/>
                                             </p:txEl>
                                           </p:spTgt>
                                         </p:tgtEl>
@@ -18899,7 +18104,7 @@
                                         <p:tgtEl>
                                           <p:spTgt spid="3">
                                             <p:txEl>
-                                              <p:pRg st="1" end="1"/>
+                                              <p:pRg st="2" end="2"/>
                                             </p:txEl>
                                           </p:spTgt>
                                         </p:tgtEl>
@@ -18917,7 +18122,7 @@
                                         <p:tgtEl>
                                           <p:spTgt spid="3">
                                             <p:txEl>
-                                              <p:pRg st="1" end="1"/>
+                                              <p:pRg st="2" end="2"/>
                                             </p:txEl>
                                           </p:spTgt>
                                         </p:tgtEl>
@@ -18944,7 +18149,7 @@
                                         <p:tgtEl>
                                           <p:spTgt spid="3">
                                             <p:txEl>
-                                              <p:pRg st="1" end="1"/>
+                                              <p:pRg st="2" end="2"/>
                                             </p:txEl>
                                           </p:spTgt>
                                         </p:tgtEl>
@@ -19002,7 +18207,7 @@
                                         <p:tgtEl>
                                           <p:spTgt spid="3">
                                             <p:txEl>
-                                              <p:pRg st="2" end="2"/>
+                                              <p:pRg st="3" end="3"/>
                                             </p:txEl>
                                           </p:spTgt>
                                         </p:tgtEl>
@@ -19020,7 +18225,7 @@
                                         <p:tgtEl>
                                           <p:spTgt spid="3">
                                             <p:txEl>
-                                              <p:pRg st="2" end="2"/>
+                                              <p:pRg st="3" end="3"/>
                                             </p:txEl>
                                           </p:spTgt>
                                         </p:tgtEl>
@@ -19047,7 +18252,7 @@
                                         <p:tgtEl>
                                           <p:spTgt spid="3">
                                             <p:txEl>
-                                              <p:pRg st="2" end="2"/>
+                                              <p:pRg st="3" end="3"/>
                                             </p:txEl>
                                           </p:spTgt>
                                         </p:tgtEl>
@@ -19105,7 +18310,7 @@
                                         <p:tgtEl>
                                           <p:spTgt spid="3">
                                             <p:txEl>
-                                              <p:pRg st="3" end="3"/>
+                                              <p:pRg st="4" end="4"/>
                                             </p:txEl>
                                           </p:spTgt>
                                         </p:tgtEl>
@@ -19123,7 +18328,7 @@
                                         <p:tgtEl>
                                           <p:spTgt spid="3">
                                             <p:txEl>
-                                              <p:pRg st="3" end="3"/>
+                                              <p:pRg st="4" end="4"/>
                                             </p:txEl>
                                           </p:spTgt>
                                         </p:tgtEl>
@@ -19150,7 +18355,7 @@
                                         <p:tgtEl>
                                           <p:spTgt spid="3">
                                             <p:txEl>
-                                              <p:pRg st="3" end="3"/>
+                                              <p:pRg st="4" end="4"/>
                                             </p:txEl>
                                           </p:spTgt>
                                         </p:tgtEl>
@@ -19208,7 +18413,7 @@
                                         <p:tgtEl>
                                           <p:spTgt spid="3">
                                             <p:txEl>
-                                              <p:pRg st="4" end="4"/>
+                                              <p:pRg st="5" end="5"/>
                                             </p:txEl>
                                           </p:spTgt>
                                         </p:tgtEl>
@@ -19226,7 +18431,7 @@
                                         <p:tgtEl>
                                           <p:spTgt spid="3">
                                             <p:txEl>
-                                              <p:pRg st="4" end="4"/>
+                                              <p:pRg st="5" end="5"/>
                                             </p:txEl>
                                           </p:spTgt>
                                         </p:tgtEl>
@@ -19253,109 +18458,6 @@
                                         <p:tgtEl>
                                           <p:spTgt spid="3">
                                             <p:txEl>
-                                              <p:pRg st="4" end="4"/>
-                                            </p:txEl>
-                                          </p:spTgt>
-                                        </p:tgtEl>
-                                        <p:attrNameLst>
-                                          <p:attrName>ppt_y</p:attrName>
-                                        </p:attrNameLst>
-                                      </p:cBhvr>
-                                      <p:tavLst>
-                                        <p:tav tm="0">
-                                          <p:val>
-                                            <p:strVal val="1+#ppt_h/2"/>
-                                          </p:val>
-                                        </p:tav>
-                                        <p:tav tm="100000">
-                                          <p:val>
-                                            <p:strVal val="#ppt_y"/>
-                                          </p:val>
-                                        </p:tav>
-                                      </p:tavLst>
-                                    </p:anim>
-                                  </p:childTnLst>
-                                </p:cTn>
-                              </p:par>
-                            </p:childTnLst>
-                          </p:cTn>
-                        </p:par>
-                      </p:childTnLst>
-                    </p:cTn>
-                  </p:par>
-                  <p:par>
-                    <p:cTn id="37" fill="hold">
-                      <p:stCondLst>
-                        <p:cond delay="indefinite"/>
-                      </p:stCondLst>
-                      <p:childTnLst>
-                        <p:par>
-                          <p:cTn id="38" fill="hold">
-                            <p:stCondLst>
-                              <p:cond delay="0"/>
-                            </p:stCondLst>
-                            <p:childTnLst>
-                              <p:par>
-                                <p:cTn id="39" presetID="2" presetClass="entr" presetSubtype="4" fill="hold" grpId="0" nodeType="clickEffect">
-                                  <p:stCondLst>
-                                    <p:cond delay="0"/>
-                                  </p:stCondLst>
-                                  <p:childTnLst>
-                                    <p:set>
-                                      <p:cBhvr>
-                                        <p:cTn id="40" dur="1" fill="hold">
-                                          <p:stCondLst>
-                                            <p:cond delay="0"/>
-                                          </p:stCondLst>
-                                        </p:cTn>
-                                        <p:tgtEl>
-                                          <p:spTgt spid="3">
-                                            <p:txEl>
-                                              <p:pRg st="5" end="5"/>
-                                            </p:txEl>
-                                          </p:spTgt>
-                                        </p:tgtEl>
-                                        <p:attrNameLst>
-                                          <p:attrName>style.visibility</p:attrName>
-                                        </p:attrNameLst>
-                                      </p:cBhvr>
-                                      <p:to>
-                                        <p:strVal val="visible"/>
-                                      </p:to>
-                                    </p:set>
-                                    <p:anim calcmode="lin" valueType="num">
-                                      <p:cBhvr additive="base">
-                                        <p:cTn id="41" dur="500" fill="hold"/>
-                                        <p:tgtEl>
-                                          <p:spTgt spid="3">
-                                            <p:txEl>
-                                              <p:pRg st="5" end="5"/>
-                                            </p:txEl>
-                                          </p:spTgt>
-                                        </p:tgtEl>
-                                        <p:attrNameLst>
-                                          <p:attrName>ppt_x</p:attrName>
-                                        </p:attrNameLst>
-                                      </p:cBhvr>
-                                      <p:tavLst>
-                                        <p:tav tm="0">
-                                          <p:val>
-                                            <p:strVal val="#ppt_x"/>
-                                          </p:val>
-                                        </p:tav>
-                                        <p:tav tm="100000">
-                                          <p:val>
-                                            <p:strVal val="#ppt_x"/>
-                                          </p:val>
-                                        </p:tav>
-                                      </p:tavLst>
-                                    </p:anim>
-                                    <p:anim calcmode="lin" valueType="num">
-                                      <p:cBhvr additive="base">
-                                        <p:cTn id="42" dur="500" fill="hold"/>
-                                        <p:tgtEl>
-                                          <p:spTgt spid="3">
-                                            <p:txEl>
                                               <p:pRg st="5" end="5"/>
                                             </p:txEl>
                                           </p:spTgt>
@@ -19368,696 +18470,6 @@
                                         <p:tav tm="0">
                                           <p:val>
                                             <p:strVal val="1+#ppt_h/2"/>
-                                          </p:val>
-                                        </p:tav>
-                                        <p:tav tm="100000">
-                                          <p:val>
-                                            <p:strVal val="#ppt_y"/>
-                                          </p:val>
-                                        </p:tav>
-                                      </p:tavLst>
-                                    </p:anim>
-                                  </p:childTnLst>
-                                </p:cTn>
-                              </p:par>
-                            </p:childTnLst>
-                          </p:cTn>
-                        </p:par>
-                      </p:childTnLst>
-                    </p:cTn>
-                  </p:par>
-                  <p:par>
-                    <p:cTn id="43" fill="hold">
-                      <p:stCondLst>
-                        <p:cond delay="indefinite"/>
-                      </p:stCondLst>
-                      <p:childTnLst>
-                        <p:par>
-                          <p:cTn id="44" fill="hold">
-                            <p:stCondLst>
-                              <p:cond delay="0"/>
-                            </p:stCondLst>
-                            <p:childTnLst>
-                              <p:par>
-                                <p:cTn id="45" presetID="42" presetClass="entr" presetSubtype="0" fill="hold" grpId="0" nodeType="clickEffect">
-                                  <p:stCondLst>
-                                    <p:cond delay="0"/>
-                                  </p:stCondLst>
-                                  <p:childTnLst>
-                                    <p:set>
-                                      <p:cBhvr>
-                                        <p:cTn id="46" dur="1" fill="hold">
-                                          <p:stCondLst>
-                                            <p:cond delay="0"/>
-                                          </p:stCondLst>
-                                        </p:cTn>
-                                        <p:tgtEl>
-                                          <p:spTgt spid="4">
-                                            <p:txEl>
-                                              <p:pRg st="0" end="0"/>
-                                            </p:txEl>
-                                          </p:spTgt>
-                                        </p:tgtEl>
-                                        <p:attrNameLst>
-                                          <p:attrName>style.visibility</p:attrName>
-                                        </p:attrNameLst>
-                                      </p:cBhvr>
-                                      <p:to>
-                                        <p:strVal val="visible"/>
-                                      </p:to>
-                                    </p:set>
-                                    <p:animEffect transition="in" filter="fade">
-                                      <p:cBhvr>
-                                        <p:cTn id="47" dur="1000"/>
-                                        <p:tgtEl>
-                                          <p:spTgt spid="4">
-                                            <p:txEl>
-                                              <p:pRg st="0" end="0"/>
-                                            </p:txEl>
-                                          </p:spTgt>
-                                        </p:tgtEl>
-                                      </p:cBhvr>
-                                    </p:animEffect>
-                                    <p:anim calcmode="lin" valueType="num">
-                                      <p:cBhvr>
-                                        <p:cTn id="48" dur="1000" fill="hold"/>
-                                        <p:tgtEl>
-                                          <p:spTgt spid="4">
-                                            <p:txEl>
-                                              <p:pRg st="0" end="0"/>
-                                            </p:txEl>
-                                          </p:spTgt>
-                                        </p:tgtEl>
-                                        <p:attrNameLst>
-                                          <p:attrName>ppt_x</p:attrName>
-                                        </p:attrNameLst>
-                                      </p:cBhvr>
-                                      <p:tavLst>
-                                        <p:tav tm="0">
-                                          <p:val>
-                                            <p:strVal val="#ppt_x"/>
-                                          </p:val>
-                                        </p:tav>
-                                        <p:tav tm="100000">
-                                          <p:val>
-                                            <p:strVal val="#ppt_x"/>
-                                          </p:val>
-                                        </p:tav>
-                                      </p:tavLst>
-                                    </p:anim>
-                                    <p:anim calcmode="lin" valueType="num">
-                                      <p:cBhvr>
-                                        <p:cTn id="49" dur="1000" fill="hold"/>
-                                        <p:tgtEl>
-                                          <p:spTgt spid="4">
-                                            <p:txEl>
-                                              <p:pRg st="0" end="0"/>
-                                            </p:txEl>
-                                          </p:spTgt>
-                                        </p:tgtEl>
-                                        <p:attrNameLst>
-                                          <p:attrName>ppt_y</p:attrName>
-                                        </p:attrNameLst>
-                                      </p:cBhvr>
-                                      <p:tavLst>
-                                        <p:tav tm="0">
-                                          <p:val>
-                                            <p:strVal val="#ppt_y+.1"/>
-                                          </p:val>
-                                        </p:tav>
-                                        <p:tav tm="100000">
-                                          <p:val>
-                                            <p:strVal val="#ppt_y"/>
-                                          </p:val>
-                                        </p:tav>
-                                      </p:tavLst>
-                                    </p:anim>
-                                  </p:childTnLst>
-                                </p:cTn>
-                              </p:par>
-                            </p:childTnLst>
-                          </p:cTn>
-                        </p:par>
-                      </p:childTnLst>
-                    </p:cTn>
-                  </p:par>
-                  <p:par>
-                    <p:cTn id="50" fill="hold">
-                      <p:stCondLst>
-                        <p:cond delay="indefinite"/>
-                      </p:stCondLst>
-                      <p:childTnLst>
-                        <p:par>
-                          <p:cTn id="51" fill="hold">
-                            <p:stCondLst>
-                              <p:cond delay="0"/>
-                            </p:stCondLst>
-                            <p:childTnLst>
-                              <p:par>
-                                <p:cTn id="52" presetID="42" presetClass="entr" presetSubtype="0" fill="hold" grpId="0" nodeType="clickEffect">
-                                  <p:stCondLst>
-                                    <p:cond delay="0"/>
-                                  </p:stCondLst>
-                                  <p:childTnLst>
-                                    <p:set>
-                                      <p:cBhvr>
-                                        <p:cTn id="53" dur="1" fill="hold">
-                                          <p:stCondLst>
-                                            <p:cond delay="0"/>
-                                          </p:stCondLst>
-                                        </p:cTn>
-                                        <p:tgtEl>
-                                          <p:spTgt spid="4">
-                                            <p:txEl>
-                                              <p:pRg st="1" end="1"/>
-                                            </p:txEl>
-                                          </p:spTgt>
-                                        </p:tgtEl>
-                                        <p:attrNameLst>
-                                          <p:attrName>style.visibility</p:attrName>
-                                        </p:attrNameLst>
-                                      </p:cBhvr>
-                                      <p:to>
-                                        <p:strVal val="visible"/>
-                                      </p:to>
-                                    </p:set>
-                                    <p:animEffect transition="in" filter="fade">
-                                      <p:cBhvr>
-                                        <p:cTn id="54" dur="1000"/>
-                                        <p:tgtEl>
-                                          <p:spTgt spid="4">
-                                            <p:txEl>
-                                              <p:pRg st="1" end="1"/>
-                                            </p:txEl>
-                                          </p:spTgt>
-                                        </p:tgtEl>
-                                      </p:cBhvr>
-                                    </p:animEffect>
-                                    <p:anim calcmode="lin" valueType="num">
-                                      <p:cBhvr>
-                                        <p:cTn id="55" dur="1000" fill="hold"/>
-                                        <p:tgtEl>
-                                          <p:spTgt spid="4">
-                                            <p:txEl>
-                                              <p:pRg st="1" end="1"/>
-                                            </p:txEl>
-                                          </p:spTgt>
-                                        </p:tgtEl>
-                                        <p:attrNameLst>
-                                          <p:attrName>ppt_x</p:attrName>
-                                        </p:attrNameLst>
-                                      </p:cBhvr>
-                                      <p:tavLst>
-                                        <p:tav tm="0">
-                                          <p:val>
-                                            <p:strVal val="#ppt_x"/>
-                                          </p:val>
-                                        </p:tav>
-                                        <p:tav tm="100000">
-                                          <p:val>
-                                            <p:strVal val="#ppt_x"/>
-                                          </p:val>
-                                        </p:tav>
-                                      </p:tavLst>
-                                    </p:anim>
-                                    <p:anim calcmode="lin" valueType="num">
-                                      <p:cBhvr>
-                                        <p:cTn id="56" dur="1000" fill="hold"/>
-                                        <p:tgtEl>
-                                          <p:spTgt spid="4">
-                                            <p:txEl>
-                                              <p:pRg st="1" end="1"/>
-                                            </p:txEl>
-                                          </p:spTgt>
-                                        </p:tgtEl>
-                                        <p:attrNameLst>
-                                          <p:attrName>ppt_y</p:attrName>
-                                        </p:attrNameLst>
-                                      </p:cBhvr>
-                                      <p:tavLst>
-                                        <p:tav tm="0">
-                                          <p:val>
-                                            <p:strVal val="#ppt_y+.1"/>
-                                          </p:val>
-                                        </p:tav>
-                                        <p:tav tm="100000">
-                                          <p:val>
-                                            <p:strVal val="#ppt_y"/>
-                                          </p:val>
-                                        </p:tav>
-                                      </p:tavLst>
-                                    </p:anim>
-                                  </p:childTnLst>
-                                </p:cTn>
-                              </p:par>
-                            </p:childTnLst>
-                          </p:cTn>
-                        </p:par>
-                      </p:childTnLst>
-                    </p:cTn>
-                  </p:par>
-                  <p:par>
-                    <p:cTn id="57" fill="hold">
-                      <p:stCondLst>
-                        <p:cond delay="indefinite"/>
-                      </p:stCondLst>
-                      <p:childTnLst>
-                        <p:par>
-                          <p:cTn id="58" fill="hold">
-                            <p:stCondLst>
-                              <p:cond delay="0"/>
-                            </p:stCondLst>
-                            <p:childTnLst>
-                              <p:par>
-                                <p:cTn id="59" presetID="42" presetClass="entr" presetSubtype="0" fill="hold" grpId="0" nodeType="clickEffect">
-                                  <p:stCondLst>
-                                    <p:cond delay="0"/>
-                                  </p:stCondLst>
-                                  <p:childTnLst>
-                                    <p:set>
-                                      <p:cBhvr>
-                                        <p:cTn id="60" dur="1" fill="hold">
-                                          <p:stCondLst>
-                                            <p:cond delay="0"/>
-                                          </p:stCondLst>
-                                        </p:cTn>
-                                        <p:tgtEl>
-                                          <p:spTgt spid="4">
-                                            <p:txEl>
-                                              <p:pRg st="2" end="2"/>
-                                            </p:txEl>
-                                          </p:spTgt>
-                                        </p:tgtEl>
-                                        <p:attrNameLst>
-                                          <p:attrName>style.visibility</p:attrName>
-                                        </p:attrNameLst>
-                                      </p:cBhvr>
-                                      <p:to>
-                                        <p:strVal val="visible"/>
-                                      </p:to>
-                                    </p:set>
-                                    <p:animEffect transition="in" filter="fade">
-                                      <p:cBhvr>
-                                        <p:cTn id="61" dur="1000"/>
-                                        <p:tgtEl>
-                                          <p:spTgt spid="4">
-                                            <p:txEl>
-                                              <p:pRg st="2" end="2"/>
-                                            </p:txEl>
-                                          </p:spTgt>
-                                        </p:tgtEl>
-                                      </p:cBhvr>
-                                    </p:animEffect>
-                                    <p:anim calcmode="lin" valueType="num">
-                                      <p:cBhvr>
-                                        <p:cTn id="62" dur="1000" fill="hold"/>
-                                        <p:tgtEl>
-                                          <p:spTgt spid="4">
-                                            <p:txEl>
-                                              <p:pRg st="2" end="2"/>
-                                            </p:txEl>
-                                          </p:spTgt>
-                                        </p:tgtEl>
-                                        <p:attrNameLst>
-                                          <p:attrName>ppt_x</p:attrName>
-                                        </p:attrNameLst>
-                                      </p:cBhvr>
-                                      <p:tavLst>
-                                        <p:tav tm="0">
-                                          <p:val>
-                                            <p:strVal val="#ppt_x"/>
-                                          </p:val>
-                                        </p:tav>
-                                        <p:tav tm="100000">
-                                          <p:val>
-                                            <p:strVal val="#ppt_x"/>
-                                          </p:val>
-                                        </p:tav>
-                                      </p:tavLst>
-                                    </p:anim>
-                                    <p:anim calcmode="lin" valueType="num">
-                                      <p:cBhvr>
-                                        <p:cTn id="63" dur="1000" fill="hold"/>
-                                        <p:tgtEl>
-                                          <p:spTgt spid="4">
-                                            <p:txEl>
-                                              <p:pRg st="2" end="2"/>
-                                            </p:txEl>
-                                          </p:spTgt>
-                                        </p:tgtEl>
-                                        <p:attrNameLst>
-                                          <p:attrName>ppt_y</p:attrName>
-                                        </p:attrNameLst>
-                                      </p:cBhvr>
-                                      <p:tavLst>
-                                        <p:tav tm="0">
-                                          <p:val>
-                                            <p:strVal val="#ppt_y+.1"/>
-                                          </p:val>
-                                        </p:tav>
-                                        <p:tav tm="100000">
-                                          <p:val>
-                                            <p:strVal val="#ppt_y"/>
-                                          </p:val>
-                                        </p:tav>
-                                      </p:tavLst>
-                                    </p:anim>
-                                  </p:childTnLst>
-                                </p:cTn>
-                              </p:par>
-                            </p:childTnLst>
-                          </p:cTn>
-                        </p:par>
-                      </p:childTnLst>
-                    </p:cTn>
-                  </p:par>
-                  <p:par>
-                    <p:cTn id="64" fill="hold">
-                      <p:stCondLst>
-                        <p:cond delay="indefinite"/>
-                      </p:stCondLst>
-                      <p:childTnLst>
-                        <p:par>
-                          <p:cTn id="65" fill="hold">
-                            <p:stCondLst>
-                              <p:cond delay="0"/>
-                            </p:stCondLst>
-                            <p:childTnLst>
-                              <p:par>
-                                <p:cTn id="66" presetID="42" presetClass="entr" presetSubtype="0" fill="hold" grpId="0" nodeType="clickEffect">
-                                  <p:stCondLst>
-                                    <p:cond delay="0"/>
-                                  </p:stCondLst>
-                                  <p:childTnLst>
-                                    <p:set>
-                                      <p:cBhvr>
-                                        <p:cTn id="67" dur="1" fill="hold">
-                                          <p:stCondLst>
-                                            <p:cond delay="0"/>
-                                          </p:stCondLst>
-                                        </p:cTn>
-                                        <p:tgtEl>
-                                          <p:spTgt spid="4">
-                                            <p:txEl>
-                                              <p:pRg st="3" end="3"/>
-                                            </p:txEl>
-                                          </p:spTgt>
-                                        </p:tgtEl>
-                                        <p:attrNameLst>
-                                          <p:attrName>style.visibility</p:attrName>
-                                        </p:attrNameLst>
-                                      </p:cBhvr>
-                                      <p:to>
-                                        <p:strVal val="visible"/>
-                                      </p:to>
-                                    </p:set>
-                                    <p:animEffect transition="in" filter="fade">
-                                      <p:cBhvr>
-                                        <p:cTn id="68" dur="1000"/>
-                                        <p:tgtEl>
-                                          <p:spTgt spid="4">
-                                            <p:txEl>
-                                              <p:pRg st="3" end="3"/>
-                                            </p:txEl>
-                                          </p:spTgt>
-                                        </p:tgtEl>
-                                      </p:cBhvr>
-                                    </p:animEffect>
-                                    <p:anim calcmode="lin" valueType="num">
-                                      <p:cBhvr>
-                                        <p:cTn id="69" dur="1000" fill="hold"/>
-                                        <p:tgtEl>
-                                          <p:spTgt spid="4">
-                                            <p:txEl>
-                                              <p:pRg st="3" end="3"/>
-                                            </p:txEl>
-                                          </p:spTgt>
-                                        </p:tgtEl>
-                                        <p:attrNameLst>
-                                          <p:attrName>ppt_x</p:attrName>
-                                        </p:attrNameLst>
-                                      </p:cBhvr>
-                                      <p:tavLst>
-                                        <p:tav tm="0">
-                                          <p:val>
-                                            <p:strVal val="#ppt_x"/>
-                                          </p:val>
-                                        </p:tav>
-                                        <p:tav tm="100000">
-                                          <p:val>
-                                            <p:strVal val="#ppt_x"/>
-                                          </p:val>
-                                        </p:tav>
-                                      </p:tavLst>
-                                    </p:anim>
-                                    <p:anim calcmode="lin" valueType="num">
-                                      <p:cBhvr>
-                                        <p:cTn id="70" dur="1000" fill="hold"/>
-                                        <p:tgtEl>
-                                          <p:spTgt spid="4">
-                                            <p:txEl>
-                                              <p:pRg st="3" end="3"/>
-                                            </p:txEl>
-                                          </p:spTgt>
-                                        </p:tgtEl>
-                                        <p:attrNameLst>
-                                          <p:attrName>ppt_y</p:attrName>
-                                        </p:attrNameLst>
-                                      </p:cBhvr>
-                                      <p:tavLst>
-                                        <p:tav tm="0">
-                                          <p:val>
-                                            <p:strVal val="#ppt_y+.1"/>
-                                          </p:val>
-                                        </p:tav>
-                                        <p:tav tm="100000">
-                                          <p:val>
-                                            <p:strVal val="#ppt_y"/>
-                                          </p:val>
-                                        </p:tav>
-                                      </p:tavLst>
-                                    </p:anim>
-                                  </p:childTnLst>
-                                </p:cTn>
-                              </p:par>
-                            </p:childTnLst>
-                          </p:cTn>
-                        </p:par>
-                      </p:childTnLst>
-                    </p:cTn>
-                  </p:par>
-                  <p:par>
-                    <p:cTn id="71" fill="hold">
-                      <p:stCondLst>
-                        <p:cond delay="indefinite"/>
-                      </p:stCondLst>
-                      <p:childTnLst>
-                        <p:par>
-                          <p:cTn id="72" fill="hold">
-                            <p:stCondLst>
-                              <p:cond delay="0"/>
-                            </p:stCondLst>
-                            <p:childTnLst>
-                              <p:par>
-                                <p:cTn id="73" presetID="42" presetClass="entr" presetSubtype="0" fill="hold" grpId="0" nodeType="clickEffect">
-                                  <p:stCondLst>
-                                    <p:cond delay="0"/>
-                                  </p:stCondLst>
-                                  <p:childTnLst>
-                                    <p:set>
-                                      <p:cBhvr>
-                                        <p:cTn id="74" dur="1" fill="hold">
-                                          <p:stCondLst>
-                                            <p:cond delay="0"/>
-                                          </p:stCondLst>
-                                        </p:cTn>
-                                        <p:tgtEl>
-                                          <p:spTgt spid="4">
-                                            <p:txEl>
-                                              <p:pRg st="4" end="4"/>
-                                            </p:txEl>
-                                          </p:spTgt>
-                                        </p:tgtEl>
-                                        <p:attrNameLst>
-                                          <p:attrName>style.visibility</p:attrName>
-                                        </p:attrNameLst>
-                                      </p:cBhvr>
-                                      <p:to>
-                                        <p:strVal val="visible"/>
-                                      </p:to>
-                                    </p:set>
-                                    <p:animEffect transition="in" filter="fade">
-                                      <p:cBhvr>
-                                        <p:cTn id="75" dur="1000"/>
-                                        <p:tgtEl>
-                                          <p:spTgt spid="4">
-                                            <p:txEl>
-                                              <p:pRg st="4" end="4"/>
-                                            </p:txEl>
-                                          </p:spTgt>
-                                        </p:tgtEl>
-                                      </p:cBhvr>
-                                    </p:animEffect>
-                                    <p:anim calcmode="lin" valueType="num">
-                                      <p:cBhvr>
-                                        <p:cTn id="76" dur="1000" fill="hold"/>
-                                        <p:tgtEl>
-                                          <p:spTgt spid="4">
-                                            <p:txEl>
-                                              <p:pRg st="4" end="4"/>
-                                            </p:txEl>
-                                          </p:spTgt>
-                                        </p:tgtEl>
-                                        <p:attrNameLst>
-                                          <p:attrName>ppt_x</p:attrName>
-                                        </p:attrNameLst>
-                                      </p:cBhvr>
-                                      <p:tavLst>
-                                        <p:tav tm="0">
-                                          <p:val>
-                                            <p:strVal val="#ppt_x"/>
-                                          </p:val>
-                                        </p:tav>
-                                        <p:tav tm="100000">
-                                          <p:val>
-                                            <p:strVal val="#ppt_x"/>
-                                          </p:val>
-                                        </p:tav>
-                                      </p:tavLst>
-                                    </p:anim>
-                                    <p:anim calcmode="lin" valueType="num">
-                                      <p:cBhvr>
-                                        <p:cTn id="77" dur="1000" fill="hold"/>
-                                        <p:tgtEl>
-                                          <p:spTgt spid="4">
-                                            <p:txEl>
-                                              <p:pRg st="4" end="4"/>
-                                            </p:txEl>
-                                          </p:spTgt>
-                                        </p:tgtEl>
-                                        <p:attrNameLst>
-                                          <p:attrName>ppt_y</p:attrName>
-                                        </p:attrNameLst>
-                                      </p:cBhvr>
-                                      <p:tavLst>
-                                        <p:tav tm="0">
-                                          <p:val>
-                                            <p:strVal val="#ppt_y+.1"/>
-                                          </p:val>
-                                        </p:tav>
-                                        <p:tav tm="100000">
-                                          <p:val>
-                                            <p:strVal val="#ppt_y"/>
-                                          </p:val>
-                                        </p:tav>
-                                      </p:tavLst>
-                                    </p:anim>
-                                  </p:childTnLst>
-                                </p:cTn>
-                              </p:par>
-                            </p:childTnLst>
-                          </p:cTn>
-                        </p:par>
-                      </p:childTnLst>
-                    </p:cTn>
-                  </p:par>
-                  <p:par>
-                    <p:cTn id="78" fill="hold">
-                      <p:stCondLst>
-                        <p:cond delay="indefinite"/>
-                      </p:stCondLst>
-                      <p:childTnLst>
-                        <p:par>
-                          <p:cTn id="79" fill="hold">
-                            <p:stCondLst>
-                              <p:cond delay="0"/>
-                            </p:stCondLst>
-                            <p:childTnLst>
-                              <p:par>
-                                <p:cTn id="80" presetID="42" presetClass="entr" presetSubtype="0" fill="hold" grpId="0" nodeType="clickEffect">
-                                  <p:stCondLst>
-                                    <p:cond delay="0"/>
-                                  </p:stCondLst>
-                                  <p:childTnLst>
-                                    <p:set>
-                                      <p:cBhvr>
-                                        <p:cTn id="81" dur="1" fill="hold">
-                                          <p:stCondLst>
-                                            <p:cond delay="0"/>
-                                          </p:stCondLst>
-                                        </p:cTn>
-                                        <p:tgtEl>
-                                          <p:spTgt spid="4">
-                                            <p:txEl>
-                                              <p:pRg st="5" end="5"/>
-                                            </p:txEl>
-                                          </p:spTgt>
-                                        </p:tgtEl>
-                                        <p:attrNameLst>
-                                          <p:attrName>style.visibility</p:attrName>
-                                        </p:attrNameLst>
-                                      </p:cBhvr>
-                                      <p:to>
-                                        <p:strVal val="visible"/>
-                                      </p:to>
-                                    </p:set>
-                                    <p:animEffect transition="in" filter="fade">
-                                      <p:cBhvr>
-                                        <p:cTn id="82" dur="1000"/>
-                                        <p:tgtEl>
-                                          <p:spTgt spid="4">
-                                            <p:txEl>
-                                              <p:pRg st="5" end="5"/>
-                                            </p:txEl>
-                                          </p:spTgt>
-                                        </p:tgtEl>
-                                      </p:cBhvr>
-                                    </p:animEffect>
-                                    <p:anim calcmode="lin" valueType="num">
-                                      <p:cBhvr>
-                                        <p:cTn id="83" dur="1000" fill="hold"/>
-                                        <p:tgtEl>
-                                          <p:spTgt spid="4">
-                                            <p:txEl>
-                                              <p:pRg st="5" end="5"/>
-                                            </p:txEl>
-                                          </p:spTgt>
-                                        </p:tgtEl>
-                                        <p:attrNameLst>
-                                          <p:attrName>ppt_x</p:attrName>
-                                        </p:attrNameLst>
-                                      </p:cBhvr>
-                                      <p:tavLst>
-                                        <p:tav tm="0">
-                                          <p:val>
-                                            <p:strVal val="#ppt_x"/>
-                                          </p:val>
-                                        </p:tav>
-                                        <p:tav tm="100000">
-                                          <p:val>
-                                            <p:strVal val="#ppt_x"/>
-                                          </p:val>
-                                        </p:tav>
-                                      </p:tavLst>
-                                    </p:anim>
-                                    <p:anim calcmode="lin" valueType="num">
-                                      <p:cBhvr>
-                                        <p:cTn id="84" dur="1000" fill="hold"/>
-                                        <p:tgtEl>
-                                          <p:spTgt spid="4">
-                                            <p:txEl>
-                                              <p:pRg st="5" end="5"/>
-                                            </p:txEl>
-                                          </p:spTgt>
-                                        </p:tgtEl>
-                                        <p:attrNameLst>
-                                          <p:attrName>ppt_y</p:attrName>
-                                        </p:attrNameLst>
-                                      </p:cBhvr>
-                                      <p:tavLst>
-                                        <p:tav tm="0">
-                                          <p:val>
-                                            <p:strVal val="#ppt_y+.1"/>
                                           </p:val>
                                         </p:tav>
                                         <p:tav tm="100000">
@@ -20100,7 +18512,6 @@
     <p:bldLst>
       <p:bldP spid="2" grpId="0"/>
       <p:bldP spid="3" grpId="0" build="p"/>
-      <p:bldP spid="4" grpId="0" build="p"/>
     </p:bldLst>
   </p:timing>
 </p:sld>
@@ -20144,38 +18555,7 @@
           <a:bodyPr/>
           <a:lstStyle/>
           <a:p>
-            <a:r>
-              <a:rPr lang="en-US" dirty="0" err="1"/>
-              <a:t>Trân</a:t>
-            </a:r>
-            <a:r>
-              <a:rPr lang="en-US" dirty="0"/>
-              <a:t> </a:t>
-            </a:r>
-            <a:r>
-              <a:rPr lang="en-US" dirty="0" err="1"/>
-              <a:t>trọng</a:t>
-            </a:r>
-            <a:r>
-              <a:rPr lang="en-US" dirty="0"/>
-              <a:t> </a:t>
-            </a:r>
-            <a:r>
-              <a:rPr lang="en-US" dirty="0" err="1"/>
-              <a:t>cảm</a:t>
-            </a:r>
-            <a:r>
-              <a:rPr lang="en-US" dirty="0"/>
-              <a:t> </a:t>
-            </a:r>
-            <a:r>
-              <a:rPr lang="en-US" dirty="0" err="1"/>
-              <a:t>ơn</a:t>
-            </a:r>
-            <a:r>
-              <a:rPr lang="en-US" dirty="0"/>
-              <a:t>!</a:t>
-            </a:r>
+            <a:endParaRPr lang="en-US" dirty="0"/>
           </a:p>
         </p:txBody>
       </p:sp>
@@ -21704,42 +20084,42 @@
           <a:lstStyle/>
           <a:p>
             <a:r>
-              <a:rPr lang="en-US" dirty="0" err="1">
+              <a:rPr lang="en-US" sz="3200" dirty="0" err="1">
                 <a:latin typeface="Times New Roman" panose="02020603050405020304" pitchFamily="18" charset="0"/>
                 <a:cs typeface="Times New Roman" panose="02020603050405020304" pitchFamily="18" charset="0"/>
               </a:rPr>
               <a:t>II.Phân</a:t>
             </a:r>
             <a:r>
-              <a:rPr lang="en-US" dirty="0">
+              <a:rPr lang="en-US" sz="3200" dirty="0">
                 <a:latin typeface="Times New Roman" panose="02020603050405020304" pitchFamily="18" charset="0"/>
                 <a:cs typeface="Times New Roman" panose="02020603050405020304" pitchFamily="18" charset="0"/>
               </a:rPr>
               <a:t> </a:t>
             </a:r>
             <a:r>
-              <a:rPr lang="en-US" dirty="0" err="1">
+              <a:rPr lang="en-US" sz="3200" dirty="0" err="1">
                 <a:latin typeface="Times New Roman" panose="02020603050405020304" pitchFamily="18" charset="0"/>
                 <a:cs typeface="Times New Roman" panose="02020603050405020304" pitchFamily="18" charset="0"/>
               </a:rPr>
               <a:t>tích</a:t>
             </a:r>
             <a:r>
-              <a:rPr lang="en-US" dirty="0">
+              <a:rPr lang="en-US" sz="3200" dirty="0">
                 <a:latin typeface="Times New Roman" panose="02020603050405020304" pitchFamily="18" charset="0"/>
                 <a:cs typeface="Times New Roman" panose="02020603050405020304" pitchFamily="18" charset="0"/>
               </a:rPr>
               <a:t> </a:t>
             </a:r>
             <a:r>
-              <a:rPr lang="en-US" dirty="0" err="1">
+              <a:rPr lang="en-US" sz="3200" dirty="0" err="1">
                 <a:latin typeface="Times New Roman" panose="02020603050405020304" pitchFamily="18" charset="0"/>
                 <a:cs typeface="Times New Roman" panose="02020603050405020304" pitchFamily="18" charset="0"/>
               </a:rPr>
               <a:t>về</a:t>
             </a:r>
             <a:r>
-              <a:rPr lang="en-US" dirty="0">
+              <a:rPr lang="en-US" sz="3200" dirty="0">
                 <a:latin typeface="Times New Roman" panose="02020603050405020304" pitchFamily="18" charset="0"/>
                 <a:cs typeface="Times New Roman" panose="02020603050405020304" pitchFamily="18" charset="0"/>
               </a:rPr>
@@ -21748,49 +20128,49 @@
           </a:p>
           <a:p>
             <a:r>
-              <a:rPr lang="en-US" dirty="0">
+              <a:rPr lang="en-US" sz="2400" dirty="0">
                 <a:latin typeface="Times New Roman" panose="02020603050405020304" pitchFamily="18" charset="0"/>
                 <a:cs typeface="Times New Roman" panose="02020603050405020304" pitchFamily="18" charset="0"/>
               </a:rPr>
               <a:t>1.Giới </a:t>
             </a:r>
             <a:r>
-              <a:rPr lang="en-US" dirty="0" err="1">
+              <a:rPr lang="en-US" sz="2400" dirty="0" err="1">
                 <a:latin typeface="Times New Roman" panose="02020603050405020304" pitchFamily="18" charset="0"/>
                 <a:cs typeface="Times New Roman" panose="02020603050405020304" pitchFamily="18" charset="0"/>
               </a:rPr>
               <a:t>thiệu</a:t>
             </a:r>
             <a:r>
-              <a:rPr lang="en-US" dirty="0">
+              <a:rPr lang="en-US" sz="2400" dirty="0">
                 <a:latin typeface="Times New Roman" panose="02020603050405020304" pitchFamily="18" charset="0"/>
                 <a:cs typeface="Times New Roman" panose="02020603050405020304" pitchFamily="18" charset="0"/>
               </a:rPr>
               <a:t> </a:t>
             </a:r>
             <a:r>
-              <a:rPr lang="en-US" dirty="0" err="1">
+              <a:rPr lang="en-US" sz="2400" dirty="0" err="1">
                 <a:latin typeface="Times New Roman" panose="02020603050405020304" pitchFamily="18" charset="0"/>
                 <a:cs typeface="Times New Roman" panose="02020603050405020304" pitchFamily="18" charset="0"/>
               </a:rPr>
               <a:t>về</a:t>
             </a:r>
             <a:r>
-              <a:rPr lang="en-US" dirty="0">
+              <a:rPr lang="en-US" sz="2400" dirty="0">
                 <a:latin typeface="Times New Roman" panose="02020603050405020304" pitchFamily="18" charset="0"/>
                 <a:cs typeface="Times New Roman" panose="02020603050405020304" pitchFamily="18" charset="0"/>
               </a:rPr>
               <a:t> </a:t>
             </a:r>
             <a:r>
-              <a:rPr lang="en-US" dirty="0" err="1">
+              <a:rPr lang="en-US" sz="2400" dirty="0" err="1">
                 <a:latin typeface="Times New Roman" panose="02020603050405020304" pitchFamily="18" charset="0"/>
                 <a:cs typeface="Times New Roman" panose="02020603050405020304" pitchFamily="18" charset="0"/>
               </a:rPr>
               <a:t>công</a:t>
             </a:r>
             <a:r>
-              <a:rPr lang="en-US" dirty="0">
+              <a:rPr lang="en-US" sz="2400" dirty="0">
                 <a:latin typeface="Times New Roman" panose="02020603050405020304" pitchFamily="18" charset="0"/>
                 <a:cs typeface="Times New Roman" panose="02020603050405020304" pitchFamily="18" charset="0"/>
               </a:rPr>
@@ -21799,81 +20179,90 @@
           </a:p>
           <a:p>
             <a:r>
-              <a:rPr lang="en-US" dirty="0">
+              <a:rPr lang="en-US" sz="2400" dirty="0">
                 <a:latin typeface="Times New Roman" panose="02020603050405020304" pitchFamily="18" charset="0"/>
                 <a:cs typeface="Times New Roman" panose="02020603050405020304" pitchFamily="18" charset="0"/>
               </a:rPr>
               <a:t>2.Lịch </a:t>
             </a:r>
             <a:r>
-              <a:rPr lang="en-US" dirty="0" err="1">
+              <a:rPr lang="en-US" sz="2400" dirty="0" err="1">
                 <a:latin typeface="Times New Roman" panose="02020603050405020304" pitchFamily="18" charset="0"/>
                 <a:cs typeface="Times New Roman" panose="02020603050405020304" pitchFamily="18" charset="0"/>
               </a:rPr>
               <a:t>sử</a:t>
             </a:r>
             <a:r>
-              <a:rPr lang="en-US" dirty="0">
+              <a:rPr lang="en-US" sz="2400" dirty="0">
                 <a:latin typeface="Times New Roman" panose="02020603050405020304" pitchFamily="18" charset="0"/>
                 <a:cs typeface="Times New Roman" panose="02020603050405020304" pitchFamily="18" charset="0"/>
               </a:rPr>
               <a:t> </a:t>
             </a:r>
             <a:r>
-              <a:rPr lang="en-US" dirty="0" err="1">
+              <a:rPr lang="en-US" sz="2400" dirty="0" err="1">
                 <a:latin typeface="Times New Roman" panose="02020603050405020304" pitchFamily="18" charset="0"/>
                 <a:cs typeface="Times New Roman" panose="02020603050405020304" pitchFamily="18" charset="0"/>
               </a:rPr>
               <a:t>phát</a:t>
             </a:r>
             <a:r>
-              <a:rPr lang="en-US" dirty="0">
+              <a:rPr lang="en-US" sz="2400" dirty="0">
                 <a:latin typeface="Times New Roman" panose="02020603050405020304" pitchFamily="18" charset="0"/>
                 <a:cs typeface="Times New Roman" panose="02020603050405020304" pitchFamily="18" charset="0"/>
               </a:rPr>
               <a:t> </a:t>
             </a:r>
             <a:r>
-              <a:rPr lang="en-US" dirty="0" err="1">
+              <a:rPr lang="en-US" sz="2400" dirty="0" err="1">
                 <a:latin typeface="Times New Roman" panose="02020603050405020304" pitchFamily="18" charset="0"/>
                 <a:cs typeface="Times New Roman" panose="02020603050405020304" pitchFamily="18" charset="0"/>
               </a:rPr>
               <a:t>triển</a:t>
             </a:r>
             <a:r>
-              <a:rPr lang="en-US" dirty="0">
+              <a:rPr lang="en-US" sz="2400" dirty="0">
                 <a:latin typeface="Times New Roman" panose="02020603050405020304" pitchFamily="18" charset="0"/>
                 <a:cs typeface="Times New Roman" panose="02020603050405020304" pitchFamily="18" charset="0"/>
               </a:rPr>
               <a:t> </a:t>
             </a:r>
             <a:r>
-              <a:rPr lang="en-US" dirty="0" err="1">
+              <a:rPr lang="en-US" sz="2400" dirty="0" err="1">
                 <a:latin typeface="Times New Roman" panose="02020603050405020304" pitchFamily="18" charset="0"/>
                 <a:cs typeface="Times New Roman" panose="02020603050405020304" pitchFamily="18" charset="0"/>
               </a:rPr>
               <a:t>của</a:t>
             </a:r>
             <a:r>
-              <a:rPr lang="en-US" dirty="0">
+              <a:rPr lang="en-US" sz="2400" dirty="0">
                 <a:latin typeface="Times New Roman" panose="02020603050405020304" pitchFamily="18" charset="0"/>
                 <a:cs typeface="Times New Roman" panose="02020603050405020304" pitchFamily="18" charset="0"/>
               </a:rPr>
               <a:t> </a:t>
             </a:r>
             <a:r>
-              <a:rPr lang="en-US" dirty="0" err="1">
+              <a:rPr lang="en-US" sz="2400" dirty="0" err="1">
                 <a:latin typeface="Times New Roman" panose="02020603050405020304" pitchFamily="18" charset="0"/>
                 <a:cs typeface="Times New Roman" panose="02020603050405020304" pitchFamily="18" charset="0"/>
               </a:rPr>
               <a:t>công</a:t>
             </a:r>
             <a:r>
-              <a:rPr lang="en-US" dirty="0">
+              <a:rPr lang="en-US" sz="2400" dirty="0">
                 <a:latin typeface="Times New Roman" panose="02020603050405020304" pitchFamily="18" charset="0"/>
                 <a:cs typeface="Times New Roman" panose="02020603050405020304" pitchFamily="18" charset="0"/>
               </a:rPr>
               <a:t> ty Lazada</a:t>
+            </a:r>
+          </a:p>
+          <a:p>
+            <a:r>
+              <a:rPr lang="en-US" sz="2400" dirty="0">
+                <a:latin typeface="Times New Roman" panose="02020603050405020304" pitchFamily="18" charset="0"/>
+                <a:cs typeface="Times New Roman" panose="02020603050405020304" pitchFamily="18" charset="0"/>
+              </a:rPr>
+              <a:t>3.</a:t>
             </a:r>
           </a:p>
           <a:p>
